--- a/public/fun/pack/pptx/weddingpro/결혼식프리미엄_34_오시는길중심_포레스트골드.pptx
+++ b/public/fun/pack/pptx/weddingpro/결혼식프리미엄_34_오시는길중심_포레스트골드.pptx
@@ -113,12 +113,12 @@
   <p:extLst>
     <p:ext uri="{521415D9-36F7-43E2-AB2F-B90AF26B5E84}">
       <p14:sectionLst xmlns:p14="http://schemas.microsoft.com/office/powerpoint/2010/main">
-        <p14:section name="시작" id="{04845C9C-BBE2-4312-9FBA-3A956DF2980A}">
+        <p14:section name="시작" id="{EFC981D7-F726-40E9-BBC3-376E7C115138}">
           <p14:sldIdLst>
             <p14:sldId id="256"/>
           </p14:sldIdLst>
         </p14:section>
-        <p14:section name="본문" id="{76E08AE0-F625-4DF4-BB6E-78572D3AF79F}">
+        <p14:section name="본문" id="{E110329F-53AF-464C-BFA0-8056E2240870}">
           <p14:sldIdLst>
             <p14:sldId id="257"/>
             <p14:sldId id="258"/>
@@ -127,7 +127,7 @@
             <p14:sldId id="261"/>
           </p14:sldIdLst>
         </p14:section>
-        <p14:section name="마무리" id="{24B0E182-9D80-4138-981B-0ED0E1F8B29A}">
+        <p14:section name="마무리" id="{4E5178A1-1E45-456E-9083-8C363EDB78E7}">
           <p14:sldIdLst>
             <p14:sldId id="262"/>
           </p14:sldIdLst>
@@ -1661,7 +1661,7 @@
             </a:lvl1pPr>
           </a:lstStyle>
           <a:p>
-            <a:fld id="{5755A7FF-63A5-4835-A23D-03AE87B3B039}" type="slidenum">
+            <a:fld id="{C3B93753-A857-429C-8F22-C007A19B2800}" type="slidenum">
               <a:rPr lang="en-US"/>
               <a:t>‹#›</a:t>
             </a:fld>
@@ -2535,7 +2535,7 @@
             </a:lvl1pPr>
           </a:lstStyle>
           <a:p>
-            <a:fld id="{7F59E585-DAC1-4345-A91C-75E153CE20D8}" type="slidenum">
+            <a:fld id="{7A8B74EC-D50C-4C51-9BF2-6B8118159E9E}" type="slidenum">
               <a:rPr lang="en-US"/>
               <a:t>‹#›</a:t>
             </a:fld>
@@ -3288,7 +3288,7 @@
             </a:lvl1pPr>
           </a:lstStyle>
           <a:p>
-            <a:fld id="{E1AC44B7-823C-42D5-BD80-CD83239495AD}" type="slidenum">
+            <a:fld id="{7B54EFF7-7978-4E7E-8AE6-B061A29EF568}" type="slidenum">
               <a:rPr lang="en-US"/>
               <a:t>‹#›</a:t>
             </a:fld>
@@ -4271,7 +4271,7 @@
           <a:p>
             <a:r>
               <a:rPr lang="ko-KR"/>
-              <a:t>0000. 00. 00 · 예식장 이름</a:t>
+              <a:t>날짜 입력 · 예식장 이름</a:t>
             </a:r>
           </a:p>
         </p:txBody>
@@ -4492,7 +4492,7 @@
           <a:bodyPr/>
           <a:lstStyle/>
           <a:p>
-            <a:fld id="{E4121F93-F1D5-4E1C-9102-84BD5F7B1DAA}" type="slidenum">
+            <a:fld id="{6D12C5D8-F533-456E-9222-1D83630D1346}" type="slidenum">
               <a:rPr lang="en-US"/>
               <a:t>‹#›</a:t>
             </a:fld>
@@ -4957,7 +4957,7 @@
           <a:bodyPr/>
           <a:lstStyle/>
           <a:p>
-            <a:fld id="{78C56E89-7A25-4A4E-9084-7D483BAFA56E}" type="slidenum">
+            <a:fld id="{AB296322-31B0-4623-9770-38B99278B02F}" type="slidenum">
               <a:rPr lang="en-US"/>
               <a:t>‹#›</a:t>
             </a:fld>
@@ -5395,7 +5395,7 @@
           <a:bodyPr/>
           <a:lstStyle/>
           <a:p>
-            <a:fld id="{0480CF23-4624-45F9-9E50-9068FFD1E249}" type="slidenum">
+            <a:fld id="{81987E01-B2E6-45F4-9AA2-B9088F39022E}" type="slidenum">
               <a:rPr lang="en-US"/>
               <a:t>‹#›</a:t>
             </a:fld>
@@ -6662,7 +6662,7 @@
           <a:bodyPr/>
           <a:lstStyle/>
           <a:p>
-            <a:fld id="{79841A5F-C1AF-4D5C-9514-7C74591339C8}" type="slidenum">
+            <a:fld id="{02F12506-132D-4F4E-BE98-43A6732834EF}" type="slidenum">
               <a:rPr lang="en-US"/>
               <a:t>‹#›</a:t>
             </a:fld>
@@ -6750,7 +6750,7 @@
           <a:bodyPr/>
           <a:lstStyle/>
           <a:p>
-            <a:fld id="{9272EB69-23B1-4A13-9E18-54DFF3B1B9C7}" type="slidenum">
+            <a:fld id="{F7EF4684-DDE2-4096-8069-83F0DD2817EB}" type="slidenum">
               <a:rPr lang="en-US"/>
               <a:t>‹#›</a:t>
             </a:fld>
